--- a/courseware/202609_DSA_W05_Queue_Deque_LinkedList.pptx
+++ b/courseware/202609_DSA_W05_Queue_Deque_LinkedList.pptx
@@ -3328,7 +3328,7 @@
                 <a:latin typeface="Segoe UI"/>
                 <a:ea typeface="微软雅黑"/>
               </a:rPr>
-              <a:t>教学要求：理解队列 FIFO 特性；能够实现队列与双端队列；理解顺序表与链表的差异；分析插入/删除的时间复杂度</a:t>
+              <a:t>教学要求：理解队列 FIFO 特性；能够实现队列与双端队列；理解顺序表与链表在存储与操作上的差异；掌握链表实现技巧；分析插入/删除的时间复杂度</a:t>
             </a:r>
           </a:p>
         </p:txBody>
